--- a/materials/presentation_drafts/presentation_20260615.pptx
+++ b/materials/presentation_drafts/presentation_20260615.pptx
@@ -4103,94 +4103,6 @@
       </p:sp>
       <p:sp>
         <p:nvSpPr>
-          <p:cNvPr id="13" name="Text 11"/>
-          <p:cNvSpPr/>
-          <p:nvPr/>
-        </p:nvSpPr>
-        <p:spPr>
-          <a:xfrm>
-            <a:off x="4153102" y="7608690"/>
-            <a:ext cx="2308366" cy="663819"/>
-          </a:xfrm>
-          <a:prstGeom prst="rect">
-            <a:avLst/>
-          </a:prstGeom>
-          <a:noFill/>
-          <a:ln/>
-        </p:spPr>
-        <p:txBody>
-          <a:bodyPr wrap="square" lIns="0" tIns="0" rIns="0" bIns="0" rtlCol="0" anchor="t">
-            <a:noAutofit/>
-          </a:bodyPr>
-          <a:lstStyle/>
-          <a:p>
-            <a:pPr marL="0" indent="0" algn="l">
-              <a:buNone/>
-            </a:pPr>
-            <a:r>
-              <a:rPr lang="en-US" sz="2800" b="1" dirty="0">
-                <a:solidFill>
-                  <a:srgbClr val="15182A"/>
-                </a:solidFill>
-                <a:latin typeface="Meiryo UI" panose="020B0604030504040204" pitchFamily="50" charset="-128"/>
-                <a:ea typeface="Meiryo UI" panose="020B0604030504040204" pitchFamily="50" charset="-128"/>
-                <a:cs typeface="Arial" pitchFamily="34" charset="-120"/>
-              </a:rPr>
-              <a:t>高橋 朋子</a:t>
-            </a:r>
-            <a:endParaRPr lang="en-US" sz="2800" dirty="0">
-              <a:latin typeface="Meiryo UI" panose="020B0604030504040204" pitchFamily="50" charset="-128"/>
-              <a:ea typeface="Meiryo UI" panose="020B0604030504040204" pitchFamily="50" charset="-128"/>
-            </a:endParaRPr>
-          </a:p>
-        </p:txBody>
-      </p:sp>
-      <p:sp>
-        <p:nvSpPr>
-          <p:cNvPr id="14" name="Text 12"/>
-          <p:cNvSpPr/>
-          <p:nvPr/>
-        </p:nvSpPr>
-        <p:spPr>
-          <a:xfrm>
-            <a:off x="4153102" y="8058150"/>
-            <a:ext cx="1458962" cy="285750"/>
-          </a:xfrm>
-          <a:prstGeom prst="rect">
-            <a:avLst/>
-          </a:prstGeom>
-          <a:noFill/>
-          <a:ln/>
-        </p:spPr>
-        <p:txBody>
-          <a:bodyPr wrap="square" lIns="25400" tIns="25400" rIns="25400" bIns="25400" rtlCol="0" anchor="t">
-            <a:noAutofit/>
-          </a:bodyPr>
-          <a:lstStyle/>
-          <a:p>
-            <a:pPr marL="0" indent="0" algn="l">
-              <a:buNone/>
-            </a:pPr>
-            <a:r>
-              <a:rPr lang="en-US" sz="1350" dirty="0">
-                <a:solidFill>
-                  <a:srgbClr val="6F7388"/>
-                </a:solidFill>
-                <a:latin typeface="Meiryo UI" panose="020B0604030504040204" pitchFamily="50" charset="-128"/>
-                <a:ea typeface="Meiryo UI" panose="020B0604030504040204" pitchFamily="50" charset="-128"/>
-                <a:cs typeface="Arial" pitchFamily="34" charset="-120"/>
-              </a:rPr>
-              <a:t>Takahashi Tomoko</a:t>
-            </a:r>
-            <a:endParaRPr lang="en-US" sz="1350" dirty="0">
-              <a:latin typeface="Meiryo UI" panose="020B0604030504040204" pitchFamily="50" charset="-128"/>
-              <a:ea typeface="Meiryo UI" panose="020B0604030504040204" pitchFamily="50" charset="-128"/>
-            </a:endParaRPr>
-          </a:p>
-        </p:txBody>
-      </p:sp>
-      <p:sp>
-        <p:nvSpPr>
           <p:cNvPr id="23" name="Shape 20"/>
           <p:cNvSpPr/>
           <p:nvPr/>
@@ -5152,6 +5064,148 @@
               <a:solidFill>
                 <a:srgbClr val="E5A330"/>
               </a:solidFill>
+            </a:endParaRPr>
+          </a:p>
+        </p:txBody>
+      </p:sp>
+      <p:sp>
+        <p:nvSpPr>
+          <p:cNvPr id="37" name="Text 11">
+            <a:extLst>
+              <a:ext uri="{FF2B5EF4-FFF2-40B4-BE49-F238E27FC236}">
+                <a16:creationId xmlns:a16="http://schemas.microsoft.com/office/drawing/2014/main" id="{6547F8DD-E796-9AFA-427B-2A17EF0062F4}"/>
+              </a:ext>
+            </a:extLst>
+          </p:cNvPr>
+          <p:cNvSpPr/>
+          <p:nvPr/>
+        </p:nvSpPr>
+        <p:spPr>
+          <a:xfrm>
+            <a:off x="4153102" y="7608690"/>
+            <a:ext cx="2308366" cy="663819"/>
+          </a:xfrm>
+          <a:prstGeom prst="rect">
+            <a:avLst/>
+          </a:prstGeom>
+          <a:noFill/>
+          <a:ln/>
+        </p:spPr>
+        <p:txBody>
+          <a:bodyPr wrap="square" lIns="0" tIns="0" rIns="0" bIns="0" rtlCol="0" anchor="t">
+            <a:noAutofit/>
+          </a:bodyPr>
+          <a:lstStyle/>
+          <a:p>
+            <a:pPr marL="0" indent="0" algn="l">
+              <a:buNone/>
+            </a:pPr>
+            <a:r>
+              <a:rPr lang="en-US" altLang="ja-JP" sz="2800">
+                <a:latin typeface="Meiryo UI" panose="020B0604030504040204" pitchFamily="50" charset="-128"/>
+                <a:ea typeface="Meiryo UI" panose="020B0604030504040204" pitchFamily="50" charset="-128"/>
+              </a:rPr>
+              <a:t>XX</a:t>
+            </a:r>
+            <a:r>
+              <a:rPr lang="ja-JP" altLang="en-US" sz="2800">
+                <a:latin typeface="Meiryo UI" panose="020B0604030504040204" pitchFamily="50" charset="-128"/>
+                <a:ea typeface="Meiryo UI" panose="020B0604030504040204" pitchFamily="50" charset="-128"/>
+              </a:rPr>
+              <a:t>　</a:t>
+            </a:r>
+            <a:r>
+              <a:rPr lang="en-US" altLang="ja-JP" sz="2800">
+                <a:latin typeface="Meiryo UI" panose="020B0604030504040204" pitchFamily="50" charset="-128"/>
+                <a:ea typeface="Meiryo UI" panose="020B0604030504040204" pitchFamily="50" charset="-128"/>
+              </a:rPr>
+              <a:t>XX</a:t>
+            </a:r>
+            <a:endParaRPr lang="en-US" sz="2800">
+              <a:latin typeface="Meiryo UI" panose="020B0604030504040204" pitchFamily="50" charset="-128"/>
+              <a:ea typeface="Meiryo UI" panose="020B0604030504040204" pitchFamily="50" charset="-128"/>
+            </a:endParaRPr>
+          </a:p>
+        </p:txBody>
+      </p:sp>
+      <p:sp>
+        <p:nvSpPr>
+          <p:cNvPr id="39" name="Text 12">
+            <a:extLst>
+              <a:ext uri="{FF2B5EF4-FFF2-40B4-BE49-F238E27FC236}">
+                <a16:creationId xmlns:a16="http://schemas.microsoft.com/office/drawing/2014/main" id="{028803C3-38E0-8A50-176C-598ECD1F1CC4}"/>
+              </a:ext>
+            </a:extLst>
+          </p:cNvPr>
+          <p:cNvSpPr/>
+          <p:nvPr/>
+        </p:nvSpPr>
+        <p:spPr>
+          <a:xfrm>
+            <a:off x="4153102" y="8058150"/>
+            <a:ext cx="1458962" cy="285750"/>
+          </a:xfrm>
+          <a:prstGeom prst="rect">
+            <a:avLst/>
+          </a:prstGeom>
+          <a:noFill/>
+          <a:ln/>
+        </p:spPr>
+        <p:txBody>
+          <a:bodyPr wrap="square" lIns="25400" tIns="25400" rIns="25400" bIns="25400" rtlCol="0" anchor="t">
+            <a:noAutofit/>
+          </a:bodyPr>
+          <a:lstStyle/>
+          <a:p>
+            <a:pPr marL="0" indent="0" algn="l">
+              <a:buNone/>
+            </a:pPr>
+            <a:r>
+              <a:rPr lang="en-US" sz="1350">
+                <a:solidFill>
+                  <a:srgbClr val="6F7388"/>
+                </a:solidFill>
+                <a:latin typeface="Meiryo UI" panose="020B0604030504040204" pitchFamily="50" charset="-128"/>
+                <a:ea typeface="Meiryo UI" panose="020B0604030504040204" pitchFamily="50" charset="-128"/>
+                <a:cs typeface="Arial" pitchFamily="34" charset="-120"/>
+              </a:rPr>
+              <a:t>T</a:t>
+            </a:r>
+            <a:r>
+              <a:rPr lang="en-US" altLang="ja-JP" sz="1350">
+                <a:solidFill>
+                  <a:srgbClr val="6F7388"/>
+                </a:solidFill>
+                <a:latin typeface="Meiryo UI" panose="020B0604030504040204" pitchFamily="50" charset="-128"/>
+                <a:ea typeface="Meiryo UI" panose="020B0604030504040204" pitchFamily="50" charset="-128"/>
+                <a:cs typeface="Arial" pitchFamily="34" charset="-120"/>
+              </a:rPr>
+              <a:t>XXXX</a:t>
+            </a:r>
+            <a:br>
+              <a:rPr lang="en-US" altLang="ja-JP" sz="1350">
+                <a:solidFill>
+                  <a:srgbClr val="6F7388"/>
+                </a:solidFill>
+                <a:latin typeface="Meiryo UI" panose="020B0604030504040204" pitchFamily="50" charset="-128"/>
+                <a:ea typeface="Meiryo UI" panose="020B0604030504040204" pitchFamily="50" charset="-128"/>
+                <a:cs typeface="Arial" pitchFamily="34" charset="-120"/>
+              </a:rPr>
+            </a:br>
+            <a:r>
+              <a:rPr lang="en-US" altLang="ja-JP" sz="1350">
+                <a:solidFill>
+                  <a:srgbClr val="6F7388"/>
+                </a:solidFill>
+                <a:latin typeface="Meiryo UI" panose="020B0604030504040204" pitchFamily="50" charset="-128"/>
+                <a:ea typeface="Meiryo UI" panose="020B0604030504040204" pitchFamily="50" charset="-128"/>
+                <a:cs typeface="Arial" pitchFamily="34" charset="-120"/>
+              </a:rPr>
+              <a:t>XXXXX</a:t>
+            </a:r>
+            <a:endParaRPr lang="en-US" sz="1350">
+              <a:latin typeface="Meiryo UI" panose="020B0604030504040204" pitchFamily="50" charset="-128"/>
+              <a:ea typeface="Meiryo UI" panose="020B0604030504040204" pitchFamily="50" charset="-128"/>
             </a:endParaRPr>
           </a:p>
         </p:txBody>
